--- a/Präsentation EDA Projekt.pptx
+++ b/Präsentation EDA Projekt.pptx
@@ -247,7 +247,7 @@
           <a:p>
             <a:fld id="{6C7D76D7-B901-8E44-BB1E-2DD9E96B506E}" type="datetimeFigureOut">
               <a:rPr lang="en-US" smtClean="0"/>
-              <a:t>2/14/25</a:t>
+              <a:t>2/17/25</a:t>
             </a:fld>
             <a:endParaRPr lang="en-US"/>
           </a:p>
@@ -778,16 +778,7 @@
           <a:bodyPr/>
           <a:lstStyle/>
           <a:p>
-            <a:r>
-              <a:rPr lang="en-US" dirty="0"/>
-              <a:t>Condition: coded from 1-5 with higher number indicate better condition, based on design/quality of construction and if repairs are needed</a:t>
-            </a:r>
-          </a:p>
-          <a:p>
-            <a:r>
-              <a:rPr lang="en-US" dirty="0"/>
-              <a:t>Grade: grading system goes from 1-13, with higher numbers better quality. Based on if it meets building standards, workmanship, materials, architectural design</a:t>
-            </a:r>
+            <a:endParaRPr lang="en-US" dirty="0"/>
           </a:p>
         </p:txBody>
       </p:sp>
@@ -895,16 +886,7 @@
           <a:bodyPr/>
           <a:lstStyle/>
           <a:p>
-            <a:r>
-              <a:rPr lang="en-US" dirty="0"/>
-              <a:t>Condition: coded from 1-5 with higher number indicate better condition, based on design/quality of construction and if repairs are needed</a:t>
-            </a:r>
-          </a:p>
-          <a:p>
-            <a:r>
-              <a:rPr lang="en-US" dirty="0"/>
-              <a:t>Grade: grading system goes from 1-13, with higher numbers better quality. Based on if it meets building standards, workmanship, materials, architectural design</a:t>
-            </a:r>
+            <a:endParaRPr lang="en-US" dirty="0"/>
           </a:p>
         </p:txBody>
       </p:sp>
@@ -1269,43 +1251,6 @@
               <a:sym typeface="Wingdings" pitchFamily="2" charset="2"/>
             </a:endParaRPr>
           </a:p>
-          <a:p>
-            <a:pPr marL="171450" indent="-171450">
-              <a:buFont typeface="Wingdings" pitchFamily="2" charset="2"/>
-              <a:buChar char="à"/>
-            </a:pPr>
-            <a:endParaRPr lang="en-US" dirty="0">
-              <a:sym typeface="Wingdings" pitchFamily="2" charset="2"/>
-            </a:endParaRPr>
-          </a:p>
-          <a:p>
-            <a:pPr marL="0" indent="0">
-              <a:buNone/>
-            </a:pPr>
-            <a:r>
-              <a:rPr lang="en-US" dirty="0"/>
-              <a:t>Overall good quality:</a:t>
-            </a:r>
-          </a:p>
-          <a:p>
-            <a:r>
-              <a:rPr lang="en-US" dirty="0"/>
-              <a:t>No values missing for variables of interest</a:t>
-            </a:r>
-          </a:p>
-          <a:p>
-            <a:r>
-              <a:rPr lang="en-US" dirty="0"/>
-              <a:t>Change of variable types</a:t>
-            </a:r>
-          </a:p>
-          <a:p>
-            <a:pPr marL="171450" indent="-171450">
-              <a:buFont typeface="Wingdings" pitchFamily="2" charset="2"/>
-              <a:buChar char="à"/>
-            </a:pPr>
-            <a:endParaRPr lang="en-US" dirty="0"/>
-          </a:p>
         </p:txBody>
       </p:sp>
       <p:sp>
@@ -1388,18 +1333,7 @@
           <a:bodyPr/>
           <a:lstStyle/>
           <a:p>
-            <a:r>
-              <a:rPr lang="en-US" dirty="0"/>
-              <a:t>3 </a:t>
-            </a:r>
-            <a:r>
-              <a:rPr lang="en-US" dirty="0" err="1"/>
-              <a:t>hyptheses</a:t>
-            </a:r>
-            <a:r>
-              <a:rPr lang="en-US" dirty="0"/>
-              <a:t> to give you the best recommendation</a:t>
-            </a:r>
+            <a:endParaRPr lang="en-US" dirty="0"/>
           </a:p>
         </p:txBody>
       </p:sp>
@@ -1483,14 +1417,6 @@
           <a:bodyPr/>
           <a:lstStyle/>
           <a:p>
-            <a:r>
-              <a:rPr lang="en-US" dirty="0"/>
-              <a:t>Most houses around </a:t>
-            </a:r>
-            <a:r>
-              <a:rPr lang="en-US" dirty="0" err="1"/>
-              <a:t>seattle</a:t>
-            </a:r>
             <a:endParaRPr lang="en-US" dirty="0"/>
           </a:p>
         </p:txBody>
@@ -2168,7 +2094,7 @@
           <a:p>
             <a:fld id="{D1D1EADE-8E88-4C7C-8AC5-FB148DE4940E}" type="datetime1">
               <a:rPr lang="en-US" smtClean="0"/>
-              <a:t>2/14/25</a:t>
+              <a:t>2/17/25</a:t>
             </a:fld>
             <a:endParaRPr lang="en-US"/>
           </a:p>
@@ -2368,7 +2294,7 @@
           <a:p>
             <a:fld id="{EC3C8B9C-477D-492A-96AD-1FC2CC997A73}" type="datetime1">
               <a:rPr lang="en-US" smtClean="0"/>
-              <a:t>2/14/25</a:t>
+              <a:t>2/17/25</a:t>
             </a:fld>
             <a:endParaRPr lang="en-US"/>
           </a:p>
@@ -2578,7 +2504,7 @@
           <a:p>
             <a:fld id="{42D3AED5-E26D-4E29-B1B3-7847B6779594}" type="datetime1">
               <a:rPr lang="en-US" smtClean="0"/>
-              <a:t>2/14/25</a:t>
+              <a:t>2/17/25</a:t>
             </a:fld>
             <a:endParaRPr lang="en-US"/>
           </a:p>
@@ -2800,7 +2726,7 @@
           <a:p>
             <a:fld id="{E31BA835-12AC-4E8F-955A-EA3F4DE2791F}" type="datetime1">
               <a:rPr lang="en-US" smtClean="0"/>
-              <a:t>2/14/25</a:t>
+              <a:t>2/17/25</a:t>
             </a:fld>
             <a:endParaRPr lang="en-US"/>
           </a:p>
@@ -3001,7 +2927,7 @@
           <a:p>
             <a:fld id="{E31BA835-12AC-4E8F-955A-EA3F4DE2791F}" type="datetime1">
               <a:rPr lang="en-US" smtClean="0"/>
-              <a:t>2/14/25</a:t>
+              <a:t>2/17/25</a:t>
             </a:fld>
             <a:endParaRPr lang="en-US"/>
           </a:p>
@@ -3278,7 +3204,7 @@
           <a:p>
             <a:fld id="{E31BA835-12AC-4E8F-955A-EA3F4DE2791F}" type="datetime1">
               <a:rPr lang="en-US" smtClean="0"/>
-              <a:t>2/14/25</a:t>
+              <a:t>2/17/25</a:t>
             </a:fld>
             <a:endParaRPr lang="en-US"/>
           </a:p>
@@ -3547,7 +3473,7 @@
           <a:p>
             <a:fld id="{E31BA835-12AC-4E8F-955A-EA3F4DE2791F}" type="datetime1">
               <a:rPr lang="en-US" smtClean="0"/>
-              <a:t>2/14/25</a:t>
+              <a:t>2/17/25</a:t>
             </a:fld>
             <a:endParaRPr lang="en-US"/>
           </a:p>
@@ -3963,7 +3889,7 @@
           <a:p>
             <a:fld id="{E31BA835-12AC-4E8F-955A-EA3F4DE2791F}" type="datetime1">
               <a:rPr lang="en-US" smtClean="0"/>
-              <a:t>2/14/25</a:t>
+              <a:t>2/17/25</a:t>
             </a:fld>
             <a:endParaRPr lang="en-US"/>
           </a:p>
@@ -4106,7 +4032,7 @@
           <a:p>
             <a:fld id="{E31BA835-12AC-4E8F-955A-EA3F4DE2791F}" type="datetime1">
               <a:rPr lang="en-US" smtClean="0"/>
-              <a:t>2/14/25</a:t>
+              <a:t>2/17/25</a:t>
             </a:fld>
             <a:endParaRPr lang="en-US"/>
           </a:p>
@@ -4220,7 +4146,7 @@
           <a:p>
             <a:fld id="{E31BA835-12AC-4E8F-955A-EA3F4DE2791F}" type="datetime1">
               <a:rPr lang="en-US" smtClean="0"/>
-              <a:t>2/14/25</a:t>
+              <a:t>2/17/25</a:t>
             </a:fld>
             <a:endParaRPr lang="en-US"/>
           </a:p>
@@ -4534,7 +4460,7 @@
           <a:p>
             <a:fld id="{E31BA835-12AC-4E8F-955A-EA3F4DE2791F}" type="datetime1">
               <a:rPr lang="en-US" smtClean="0"/>
-              <a:t>2/14/25</a:t>
+              <a:t>2/17/25</a:t>
             </a:fld>
             <a:endParaRPr lang="en-US"/>
           </a:p>
@@ -4735,7 +4661,7 @@
           <a:p>
             <a:fld id="{157B6794-849E-4626-908B-D15793550EFB}" type="datetime1">
               <a:rPr lang="en-US" smtClean="0"/>
-              <a:t>2/14/25</a:t>
+              <a:t>2/17/25</a:t>
             </a:fld>
             <a:endParaRPr lang="en-US"/>
           </a:p>
@@ -5024,7 +4950,7 @@
           <a:p>
             <a:fld id="{E31BA835-12AC-4E8F-955A-EA3F4DE2791F}" type="datetime1">
               <a:rPr lang="en-US" smtClean="0"/>
-              <a:t>2/14/25</a:t>
+              <a:t>2/17/25</a:t>
             </a:fld>
             <a:endParaRPr lang="en-US"/>
           </a:p>
@@ -5225,7 +5151,7 @@
           <a:p>
             <a:fld id="{E31BA835-12AC-4E8F-955A-EA3F4DE2791F}" type="datetime1">
               <a:rPr lang="en-US" smtClean="0"/>
-              <a:t>2/14/25</a:t>
+              <a:t>2/17/25</a:t>
             </a:fld>
             <a:endParaRPr lang="en-US"/>
           </a:p>
@@ -5436,7 +5362,7 @@
           <a:p>
             <a:fld id="{E31BA835-12AC-4E8F-955A-EA3F4DE2791F}" type="datetime1">
               <a:rPr lang="en-US" smtClean="0"/>
-              <a:t>2/14/25</a:t>
+              <a:t>2/17/25</a:t>
             </a:fld>
             <a:endParaRPr lang="en-US"/>
           </a:p>
@@ -5713,7 +5639,7 @@
           <a:p>
             <a:fld id="{63DB64E7-5594-42A3-ADBF-E95A7ACEAD64}" type="datetime1">
               <a:rPr lang="en-US" smtClean="0"/>
-              <a:t>2/14/25</a:t>
+              <a:t>2/17/25</a:t>
             </a:fld>
             <a:endParaRPr lang="en-US"/>
           </a:p>
@@ -5986,7 +5912,7 @@
           <a:p>
             <a:fld id="{18462B0B-D248-4FFB-8695-AD7FA4B1284A}" type="datetime1">
               <a:rPr lang="en-US" smtClean="0"/>
-              <a:t>2/14/25</a:t>
+              <a:t>2/17/25</a:t>
             </a:fld>
             <a:endParaRPr lang="en-US"/>
           </a:p>
@@ -6409,7 +6335,7 @@
           <a:p>
             <a:fld id="{D0378EFB-9159-4510-B73F-4F0409ADE937}" type="datetime1">
               <a:rPr lang="en-US" smtClean="0"/>
-              <a:t>2/14/25</a:t>
+              <a:t>2/17/25</a:t>
             </a:fld>
             <a:endParaRPr lang="en-US"/>
           </a:p>
@@ -6551,7 +6477,7 @@
           <a:p>
             <a:fld id="{89BC9412-2452-4BED-A324-9D8C115361AD}" type="datetime1">
               <a:rPr lang="en-US" smtClean="0"/>
-              <a:t>2/14/25</a:t>
+              <a:t>2/17/25</a:t>
             </a:fld>
             <a:endParaRPr lang="en-US"/>
           </a:p>
@@ -6664,7 +6590,7 @@
           <a:p>
             <a:fld id="{F5318F62-D251-40E8-A23C-F4CFE9FEAB41}" type="datetime1">
               <a:rPr lang="en-US" smtClean="0"/>
-              <a:t>2/14/25</a:t>
+              <a:t>2/17/25</a:t>
             </a:fld>
             <a:endParaRPr lang="en-US"/>
           </a:p>
@@ -6977,7 +6903,7 @@
           <a:p>
             <a:fld id="{44F76144-149E-4874-93A5-554A0357CF82}" type="datetime1">
               <a:rPr lang="en-US" smtClean="0"/>
-              <a:t>2/14/25</a:t>
+              <a:t>2/17/25</a:t>
             </a:fld>
             <a:endParaRPr lang="en-US"/>
           </a:p>
@@ -7270,7 +7196,7 @@
           <a:p>
             <a:fld id="{50BA65D8-0540-4835-AE5C-25D29DBA01BE}" type="datetime1">
               <a:rPr lang="en-US" smtClean="0"/>
-              <a:t>2/14/25</a:t>
+              <a:t>2/17/25</a:t>
             </a:fld>
             <a:endParaRPr lang="en-US"/>
           </a:p>
@@ -7512,7 +7438,7 @@
           <a:p>
             <a:fld id="{E31BA835-12AC-4E8F-955A-EA3F4DE2791F}" type="datetime1">
               <a:rPr lang="en-US" smtClean="0"/>
-              <a:t>2/14/25</a:t>
+              <a:t>2/17/25</a:t>
             </a:fld>
             <a:endParaRPr lang="en-US"/>
           </a:p>
@@ -8166,7 +8092,7 @@
           <a:p>
             <a:fld id="{E31BA835-12AC-4E8F-955A-EA3F4DE2791F}" type="datetime1">
               <a:rPr lang="en-US" smtClean="0"/>
-              <a:t>2/14/25</a:t>
+              <a:t>2/17/25</a:t>
             </a:fld>
             <a:endParaRPr lang="en-US"/>
           </a:p>
